--- a/output_pptx/O_Holy_Night.pptx
+++ b/output_pptx/O_Holy_Night.pptx
@@ -3115,8 +3115,8 @@
         </p:nvSpPr>
         <p:spPr>
           <a:xfrm>
-            <a:off x="594360" y="2258568"/>
-            <a:ext cx="11002975" cy="685800"/>
+            <a:off x="640080" y="2052828"/>
+            <a:ext cx="10911535" cy="731520"/>
           </a:xfrm>
           <a:prstGeom prst="rect">
             <a:avLst/>
@@ -3131,7 +3131,7 @@
           <a:p>
             <a:pPr algn="ctr"/>
             <a:r>
-              <a:rPr sz="4400" b="1" i="0">
+              <a:rPr sz="4800" b="1" i="0">
                 <a:solidFill>
                   <a:srgbClr val="FFFFFF"/>
                 </a:solidFill>
@@ -3150,8 +3150,8 @@
         </p:nvSpPr>
         <p:spPr>
           <a:xfrm>
-            <a:off x="594360" y="2980944"/>
-            <a:ext cx="11002975" cy="347472"/>
+            <a:off x="640080" y="2985516"/>
+            <a:ext cx="10911535" cy="731520"/>
           </a:xfrm>
           <a:prstGeom prst="rect">
             <a:avLst/>
@@ -3166,13 +3166,13 @@
           <a:p>
             <a:pPr algn="ctr"/>
             <a:r>
-              <a:rPr sz="2200" b="0" i="1">
-                <a:solidFill>
-                  <a:srgbClr val="8C8C8C"/>
+              <a:rPr sz="4500" b="1" i="0">
+                <a:solidFill>
+                  <a:srgbClr val="FFFFFF"/>
                 </a:solidFill>
                 <a:latin typeface="Arial"/>
               </a:rPr>
-              <a:t/>
+              <a:t>Até que o Cristo na terra apareceu</a:t>
             </a:r>
           </a:p>
         </p:txBody>
@@ -3185,8 +3185,8 @@
         </p:nvSpPr>
         <p:spPr>
           <a:xfrm>
-            <a:off x="594360" y="3529584"/>
-            <a:ext cx="11002975" cy="685800"/>
+            <a:off x="640080" y="4128516"/>
+            <a:ext cx="10911535" cy="310896"/>
           </a:xfrm>
           <a:prstGeom prst="rect">
             <a:avLst/>
@@ -3201,13 +3201,13 @@
           <a:p>
             <a:pPr algn="ctr"/>
             <a:r>
-              <a:rPr sz="4141" b="1" i="0">
-                <a:solidFill>
-                  <a:srgbClr val="FFFFFF"/>
+              <a:rPr sz="2000" b="0" i="0">
+                <a:solidFill>
+                  <a:srgbClr val="828282"/>
                 </a:solidFill>
                 <a:latin typeface="Arial"/>
               </a:rPr>
-              <a:t>Até que o Cristo na terra apareceu</a:t>
+              <a:t>さやかに  星は  きらめき</a:t>
             </a:r>
           </a:p>
         </p:txBody>
@@ -3220,8 +3220,8 @@
         </p:nvSpPr>
         <p:spPr>
           <a:xfrm>
-            <a:off x="594360" y="4251960"/>
-            <a:ext cx="11002975" cy="347472"/>
+            <a:off x="640080" y="4494276"/>
+            <a:ext cx="10911535" cy="310896"/>
           </a:xfrm>
           <a:prstGeom prst="rect">
             <a:avLst/>
@@ -3236,13 +3236,13 @@
           <a:p>
             <a:pPr algn="ctr"/>
             <a:r>
-              <a:rPr sz="2200" b="0" i="1">
-                <a:solidFill>
-                  <a:srgbClr val="8C8C8C"/>
+              <a:rPr sz="2000" b="0" i="0">
+                <a:solidFill>
+                  <a:srgbClr val="828282"/>
                 </a:solidFill>
                 <a:latin typeface="Arial"/>
               </a:rPr>
-              <a:t/>
+              <a:t>御子イェス  生まれ給う</a:t>
             </a:r>
           </a:p>
         </p:txBody>
@@ -3281,8 +3281,8 @@
         </p:nvSpPr>
         <p:spPr>
           <a:xfrm>
-            <a:off x="594360" y="2258568"/>
-            <a:ext cx="11002975" cy="685800"/>
+            <a:off x="640080" y="2052828"/>
+            <a:ext cx="10911535" cy="731520"/>
           </a:xfrm>
           <a:prstGeom prst="rect">
             <a:avLst/>
@@ -3297,7 +3297,7 @@
           <a:p>
             <a:pPr algn="ctr"/>
             <a:r>
-              <a:rPr sz="4400" b="1" i="0">
+              <a:rPr sz="4800" b="1" i="0">
                 <a:solidFill>
                   <a:srgbClr val="FFFFFF"/>
                 </a:solidFill>
@@ -3316,8 +3316,8 @@
         </p:nvSpPr>
         <p:spPr>
           <a:xfrm>
-            <a:off x="594360" y="2980944"/>
-            <a:ext cx="11002975" cy="347472"/>
+            <a:off x="640080" y="2985516"/>
+            <a:ext cx="10911535" cy="731520"/>
           </a:xfrm>
           <a:prstGeom prst="rect">
             <a:avLst/>
@@ -3332,83 +3332,13 @@
           <a:p>
             <a:pPr algn="ctr"/>
             <a:r>
-              <a:rPr sz="2200" b="0" i="1">
-                <a:solidFill>
-                  <a:srgbClr val="8C8C8C"/>
-                </a:solidFill>
-                <a:latin typeface="Arial"/>
-              </a:rPr>
-              <a:t/>
-            </a:r>
-          </a:p>
-        </p:txBody>
-      </p:sp>
-      <p:sp>
-        <p:nvSpPr>
-          <p:cNvPr id="4" name="TextBox 3"/>
-          <p:cNvSpPr txBox="1"/>
-          <p:nvPr/>
-        </p:nvSpPr>
-        <p:spPr>
-          <a:xfrm>
-            <a:off x="594360" y="3529584"/>
-            <a:ext cx="11002975" cy="685800"/>
-          </a:xfrm>
-          <a:prstGeom prst="rect">
-            <a:avLst/>
-          </a:prstGeom>
-          <a:noFill/>
-        </p:spPr>
-        <p:txBody>
-          <a:bodyPr wrap="square">
-            <a:spAutoFit/>
-          </a:bodyPr>
-          <a:lstStyle/>
-          <a:p>
-            <a:pPr algn="ctr"/>
-            <a:r>
-              <a:rPr sz="4400" b="1" i="0">
+              <a:rPr sz="4800" b="1" i="0">
                 <a:solidFill>
                   <a:srgbClr val="FFFFFF"/>
                 </a:solidFill>
                 <a:latin typeface="Arial"/>
               </a:rPr>
               <a:t>Ajoelhai, ouvi a voz dos anjos</a:t>
-            </a:r>
-          </a:p>
-        </p:txBody>
-      </p:sp>
-      <p:sp>
-        <p:nvSpPr>
-          <p:cNvPr id="5" name="TextBox 4"/>
-          <p:cNvSpPr txBox="1"/>
-          <p:nvPr/>
-        </p:nvSpPr>
-        <p:spPr>
-          <a:xfrm>
-            <a:off x="594360" y="4251960"/>
-            <a:ext cx="11002975" cy="347472"/>
-          </a:xfrm>
-          <a:prstGeom prst="rect">
-            <a:avLst/>
-          </a:prstGeom>
-          <a:noFill/>
-        </p:spPr>
-        <p:txBody>
-          <a:bodyPr wrap="square">
-            <a:spAutoFit/>
-          </a:bodyPr>
-          <a:lstStyle/>
-          <a:p>
-            <a:pPr algn="ctr"/>
-            <a:r>
-              <a:rPr sz="2200" b="0" i="1">
-                <a:solidFill>
-                  <a:srgbClr val="8C8C8C"/>
-                </a:solidFill>
-                <a:latin typeface="Arial"/>
-              </a:rPr>
-              <a:t/>
             </a:r>
           </a:p>
         </p:txBody>
@@ -3447,8 +3377,8 @@
         </p:nvSpPr>
         <p:spPr>
           <a:xfrm>
-            <a:off x="594360" y="2258568"/>
-            <a:ext cx="11002975" cy="685800"/>
+            <a:off x="640080" y="2052828"/>
+            <a:ext cx="10911535" cy="731520"/>
           </a:xfrm>
           <a:prstGeom prst="rect">
             <a:avLst/>
@@ -3463,7 +3393,7 @@
           <a:p>
             <a:pPr algn="ctr"/>
             <a:r>
-              <a:rPr sz="4141" b="1" i="0">
+              <a:rPr sz="4500" b="1" i="0">
                 <a:solidFill>
                   <a:srgbClr val="FFFFFF"/>
                 </a:solidFill>
@@ -3482,8 +3412,8 @@
         </p:nvSpPr>
         <p:spPr>
           <a:xfrm>
-            <a:off x="594360" y="2980944"/>
-            <a:ext cx="11002975" cy="347472"/>
+            <a:off x="640080" y="2985516"/>
+            <a:ext cx="10911535" cy="731520"/>
           </a:xfrm>
           <a:prstGeom prst="rect">
             <a:avLst/>
@@ -3498,83 +3428,13 @@
           <a:p>
             <a:pPr algn="ctr"/>
             <a:r>
-              <a:rPr sz="2200" b="0" i="1">
-                <a:solidFill>
-                  <a:srgbClr val="8C8C8C"/>
-                </a:solidFill>
-                <a:latin typeface="Arial"/>
-              </a:rPr>
-              <a:t/>
-            </a:r>
-          </a:p>
-        </p:txBody>
-      </p:sp>
-      <p:sp>
-        <p:nvSpPr>
-          <p:cNvPr id="4" name="TextBox 3"/>
-          <p:cNvSpPr txBox="1"/>
-          <p:nvPr/>
-        </p:nvSpPr>
-        <p:spPr>
-          <a:xfrm>
-            <a:off x="594360" y="3529584"/>
-            <a:ext cx="11002975" cy="685800"/>
-          </a:xfrm>
-          <a:prstGeom prst="rect">
-            <a:avLst/>
-          </a:prstGeom>
-          <a:noFill/>
-        </p:spPr>
-        <p:txBody>
-          <a:bodyPr wrap="square">
-            <a:spAutoFit/>
-          </a:bodyPr>
-          <a:lstStyle/>
-          <a:p>
-            <a:pPr algn="ctr"/>
-            <a:r>
-              <a:rPr sz="4400" b="1" i="0">
+              <a:rPr sz="4800" b="1" i="0">
                 <a:solidFill>
                   <a:srgbClr val="FFFFFF"/>
                 </a:solidFill>
                 <a:latin typeface="Arial"/>
               </a:rPr>
               <a:t>Natal, Natal Nasceu o Redentor</a:t>
-            </a:r>
-          </a:p>
-        </p:txBody>
-      </p:sp>
-      <p:sp>
-        <p:nvSpPr>
-          <p:cNvPr id="5" name="TextBox 4"/>
-          <p:cNvSpPr txBox="1"/>
-          <p:nvPr/>
-        </p:nvSpPr>
-        <p:spPr>
-          <a:xfrm>
-            <a:off x="594360" y="4251960"/>
-            <a:ext cx="11002975" cy="347472"/>
-          </a:xfrm>
-          <a:prstGeom prst="rect">
-            <a:avLst/>
-          </a:prstGeom>
-          <a:noFill/>
-        </p:spPr>
-        <p:txBody>
-          <a:bodyPr wrap="square">
-            <a:spAutoFit/>
-          </a:bodyPr>
-          <a:lstStyle/>
-          <a:p>
-            <a:pPr algn="ctr"/>
-            <a:r>
-              <a:rPr sz="2200" b="0" i="1">
-                <a:solidFill>
-                  <a:srgbClr val="8C8C8C"/>
-                </a:solidFill>
-                <a:latin typeface="Arial"/>
-              </a:rPr>
-              <a:t/>
             </a:r>
           </a:p>
         </p:txBody>
@@ -3613,8 +3473,8 @@
         </p:nvSpPr>
         <p:spPr>
           <a:xfrm>
-            <a:off x="594360" y="2894076"/>
-            <a:ext cx="11002975" cy="685800"/>
+            <a:off x="640080" y="2702052"/>
+            <a:ext cx="10911535" cy="731520"/>
           </a:xfrm>
           <a:prstGeom prst="rect">
             <a:avLst/>
@@ -3629,48 +3489,13 @@
           <a:p>
             <a:pPr algn="ctr"/>
             <a:r>
-              <a:rPr sz="4400" b="1" i="0">
+              <a:rPr sz="4800" b="1" i="0">
                 <a:solidFill>
                   <a:srgbClr val="FFFFFF"/>
                 </a:solidFill>
                 <a:latin typeface="Arial"/>
               </a:rPr>
               <a:t>Natal, Natal Nasceu o Redentor</a:t>
-            </a:r>
-          </a:p>
-        </p:txBody>
-      </p:sp>
-      <p:sp>
-        <p:nvSpPr>
-          <p:cNvPr id="3" name="TextBox 2"/>
-          <p:cNvSpPr txBox="1"/>
-          <p:nvPr/>
-        </p:nvSpPr>
-        <p:spPr>
-          <a:xfrm>
-            <a:off x="594360" y="3616452"/>
-            <a:ext cx="11002975" cy="347472"/>
-          </a:xfrm>
-          <a:prstGeom prst="rect">
-            <a:avLst/>
-          </a:prstGeom>
-          <a:noFill/>
-        </p:spPr>
-        <p:txBody>
-          <a:bodyPr wrap="square">
-            <a:spAutoFit/>
-          </a:bodyPr>
-          <a:lstStyle/>
-          <a:p>
-            <a:pPr algn="ctr"/>
-            <a:r>
-              <a:rPr sz="2200" b="0" i="1">
-                <a:solidFill>
-                  <a:srgbClr val="8C8C8C"/>
-                </a:solidFill>
-                <a:latin typeface="Arial"/>
-              </a:rPr>
-              <a:t/>
             </a:r>
           </a:p>
         </p:txBody>
@@ -3709,8 +3534,8 @@
         </p:nvSpPr>
         <p:spPr>
           <a:xfrm>
-            <a:off x="594360" y="2258568"/>
-            <a:ext cx="11002975" cy="685800"/>
+            <a:off x="640080" y="2052828"/>
+            <a:ext cx="10911535" cy="731520"/>
           </a:xfrm>
           <a:prstGeom prst="rect">
             <a:avLst/>
@@ -3725,7 +3550,7 @@
           <a:p>
             <a:pPr algn="ctr"/>
             <a:r>
-              <a:rPr sz="4400" b="1" i="0">
+              <a:rPr sz="4800" b="1" i="0">
                 <a:solidFill>
                   <a:srgbClr val="FFFFFF"/>
                 </a:solidFill>
@@ -3744,8 +3569,8 @@
         </p:nvSpPr>
         <p:spPr>
           <a:xfrm>
-            <a:off x="594360" y="2980944"/>
-            <a:ext cx="11002975" cy="347472"/>
+            <a:off x="640080" y="2985516"/>
+            <a:ext cx="10911535" cy="731520"/>
           </a:xfrm>
           <a:prstGeom prst="rect">
             <a:avLst/>
@@ -3760,13 +3585,13 @@
           <a:p>
             <a:pPr algn="ctr"/>
             <a:r>
-              <a:rPr sz="2200" b="0" i="1">
-                <a:solidFill>
-                  <a:srgbClr val="8C8C8C"/>
+              <a:rPr sz="4100" b="1" i="0">
+                <a:solidFill>
+                  <a:srgbClr val="FFFFFF"/>
                 </a:solidFill>
                 <a:latin typeface="Arial"/>
               </a:rPr>
-              <a:t/>
+              <a:t>Em clara aurora, a nova luz se ergueu</a:t>
             </a:r>
           </a:p>
         </p:txBody>
@@ -3779,8 +3604,8 @@
         </p:nvSpPr>
         <p:spPr>
           <a:xfrm>
-            <a:off x="594360" y="3529584"/>
-            <a:ext cx="11002975" cy="685800"/>
+            <a:off x="640080" y="4128516"/>
+            <a:ext cx="10911535" cy="310896"/>
           </a:xfrm>
           <a:prstGeom prst="rect">
             <a:avLst/>
@@ -3795,13 +3620,13 @@
           <a:p>
             <a:pPr algn="ctr"/>
             <a:r>
-              <a:rPr sz="3805" b="1" i="0">
-                <a:solidFill>
-                  <a:srgbClr val="FFFFFF"/>
+              <a:rPr sz="2000" b="0" i="0">
+                <a:solidFill>
+                  <a:srgbClr val="828282"/>
                 </a:solidFill>
                 <a:latin typeface="Arial"/>
               </a:rPr>
-              <a:t>Em clara aurora, a nova luz se ergueu</a:t>
+              <a:t>長くも    闇路を   たど - り</a:t>
             </a:r>
           </a:p>
         </p:txBody>
@@ -3814,8 +3639,8 @@
         </p:nvSpPr>
         <p:spPr>
           <a:xfrm>
-            <a:off x="594360" y="4251960"/>
-            <a:ext cx="11002975" cy="347472"/>
+            <a:off x="640080" y="4494276"/>
+            <a:ext cx="10911535" cy="310896"/>
           </a:xfrm>
           <a:prstGeom prst="rect">
             <a:avLst/>
@@ -3830,13 +3655,13 @@
           <a:p>
             <a:pPr algn="ctr"/>
             <a:r>
-              <a:rPr sz="2200" b="0" i="1">
-                <a:solidFill>
-                  <a:srgbClr val="8C8C8C"/>
+              <a:rPr sz="2000" b="0" i="0">
+                <a:solidFill>
+                  <a:srgbClr val="828282"/>
                 </a:solidFill>
                 <a:latin typeface="Arial"/>
               </a:rPr>
-              <a:t/>
+              <a:t>メシヤを  待てる  た-み-に</a:t>
             </a:r>
           </a:p>
         </p:txBody>
@@ -3875,8 +3700,8 @@
         </p:nvSpPr>
         <p:spPr>
           <a:xfrm>
-            <a:off x="594360" y="2258568"/>
-            <a:ext cx="11002975" cy="685800"/>
+            <a:off x="640080" y="2052828"/>
+            <a:ext cx="10911535" cy="731520"/>
           </a:xfrm>
           <a:prstGeom prst="rect">
             <a:avLst/>
@@ -3891,7 +3716,7 @@
           <a:p>
             <a:pPr algn="ctr"/>
             <a:r>
-              <a:rPr sz="4400" b="1" i="0">
+              <a:rPr sz="4800" b="1" i="0">
                 <a:solidFill>
                   <a:srgbClr val="FFFFFF"/>
                 </a:solidFill>
@@ -3910,8 +3735,8 @@
         </p:nvSpPr>
         <p:spPr>
           <a:xfrm>
-            <a:off x="594360" y="2980944"/>
-            <a:ext cx="11002975" cy="347472"/>
+            <a:off x="640080" y="2985516"/>
+            <a:ext cx="10911535" cy="731520"/>
           </a:xfrm>
           <a:prstGeom prst="rect">
             <a:avLst/>
@@ -3926,13 +3751,13 @@
           <a:p>
             <a:pPr algn="ctr"/>
             <a:r>
-              <a:rPr sz="2200" b="0" i="1">
-                <a:solidFill>
-                  <a:srgbClr val="8C8C8C"/>
+              <a:rPr sz="4800" b="1" i="0">
+                <a:solidFill>
+                  <a:srgbClr val="FFFFFF"/>
                 </a:solidFill>
                 <a:latin typeface="Arial"/>
               </a:rPr>
-              <a:t/>
+              <a:t>Natal, Natal Nasceu o vosso Rei</a:t>
             </a:r>
           </a:p>
         </p:txBody>
@@ -3945,8 +3770,8 @@
         </p:nvSpPr>
         <p:spPr>
           <a:xfrm>
-            <a:off x="594360" y="3529584"/>
-            <a:ext cx="11002975" cy="685800"/>
+            <a:off x="640080" y="4128516"/>
+            <a:ext cx="10911535" cy="310896"/>
           </a:xfrm>
           <a:prstGeom prst="rect">
             <a:avLst/>
@@ -3961,13 +3786,13 @@
           <a:p>
             <a:pPr algn="ctr"/>
             <a:r>
-              <a:rPr sz="4400" b="1" i="0">
-                <a:solidFill>
-                  <a:srgbClr val="FFFFFF"/>
+              <a:rPr sz="2000" b="0" i="0">
+                <a:solidFill>
+                  <a:srgbClr val="828282"/>
                 </a:solidFill>
                 <a:latin typeface="Arial"/>
               </a:rPr>
-              <a:t>Natal, Natal Nasceu o vosso Rei</a:t>
+              <a:t>新しき    朝は  来たり</a:t>
             </a:r>
           </a:p>
         </p:txBody>
@@ -3980,8 +3805,8 @@
         </p:nvSpPr>
         <p:spPr>
           <a:xfrm>
-            <a:off x="594360" y="4251960"/>
-            <a:ext cx="11002975" cy="347472"/>
+            <a:off x="640080" y="4494276"/>
+            <a:ext cx="10911535" cy="310896"/>
           </a:xfrm>
           <a:prstGeom prst="rect">
             <a:avLst/>
@@ -3996,13 +3821,13 @@
           <a:p>
             <a:pPr algn="ctr"/>
             <a:r>
-              <a:rPr sz="2200" b="0" i="1">
-                <a:solidFill>
-                  <a:srgbClr val="8C8C8C"/>
+              <a:rPr sz="2000" b="0" i="0">
+                <a:solidFill>
+                  <a:srgbClr val="828282"/>
                 </a:solidFill>
                 <a:latin typeface="Arial"/>
               </a:rPr>
-              <a:t/>
+              <a:t>さかえ ある 日は 昇る</a:t>
             </a:r>
           </a:p>
         </p:txBody>
@@ -4041,8 +3866,8 @@
         </p:nvSpPr>
         <p:spPr>
           <a:xfrm>
-            <a:off x="594360" y="2258568"/>
-            <a:ext cx="11002975" cy="685800"/>
+            <a:off x="640080" y="2052828"/>
+            <a:ext cx="10911535" cy="731520"/>
           </a:xfrm>
           <a:prstGeom prst="rect">
             <a:avLst/>
@@ -4057,7 +3882,7 @@
           <a:p>
             <a:pPr algn="ctr"/>
             <a:r>
-              <a:rPr sz="4400" b="1" i="0">
+              <a:rPr sz="4800" b="1" i="0">
                 <a:solidFill>
                   <a:srgbClr val="FFFFFF"/>
                 </a:solidFill>
@@ -4076,8 +3901,8 @@
         </p:nvSpPr>
         <p:spPr>
           <a:xfrm>
-            <a:off x="594360" y="2980944"/>
-            <a:ext cx="11002975" cy="347472"/>
+            <a:off x="640080" y="2985516"/>
+            <a:ext cx="10911535" cy="731520"/>
           </a:xfrm>
           <a:prstGeom prst="rect">
             <a:avLst/>
@@ -4092,83 +3917,13 @@
           <a:p>
             <a:pPr algn="ctr"/>
             <a:r>
-              <a:rPr sz="2200" b="0" i="1">
-                <a:solidFill>
-                  <a:srgbClr val="8C8C8C"/>
-                </a:solidFill>
-                <a:latin typeface="Arial"/>
-              </a:rPr>
-              <a:t/>
-            </a:r>
-          </a:p>
-        </p:txBody>
-      </p:sp>
-      <p:sp>
-        <p:nvSpPr>
-          <p:cNvPr id="4" name="TextBox 3"/>
-          <p:cNvSpPr txBox="1"/>
-          <p:nvPr/>
-        </p:nvSpPr>
-        <p:spPr>
-          <a:xfrm>
-            <a:off x="594360" y="3529584"/>
-            <a:ext cx="11002975" cy="685800"/>
-          </a:xfrm>
-          <a:prstGeom prst="rect">
-            <a:avLst/>
-          </a:prstGeom>
-          <a:noFill/>
-        </p:spPr>
-        <p:txBody>
-          <a:bodyPr wrap="square">
-            <a:spAutoFit/>
-          </a:bodyPr>
-          <a:lstStyle/>
-          <a:p>
-            <a:pPr algn="ctr"/>
-            <a:r>
-              <a:rPr sz="4400" b="1" i="0">
+              <a:rPr sz="4800" b="1" i="0">
                 <a:solidFill>
                   <a:srgbClr val="FFFFFF"/>
                 </a:solidFill>
                 <a:latin typeface="Arial"/>
               </a:rPr>
               <a:t>Ajoelhai, ouvi a voz dos anjos</a:t>
-            </a:r>
-          </a:p>
-        </p:txBody>
-      </p:sp>
-      <p:sp>
-        <p:nvSpPr>
-          <p:cNvPr id="5" name="TextBox 4"/>
-          <p:cNvSpPr txBox="1"/>
-          <p:nvPr/>
-        </p:nvSpPr>
-        <p:spPr>
-          <a:xfrm>
-            <a:off x="594360" y="4251960"/>
-            <a:ext cx="11002975" cy="347472"/>
-          </a:xfrm>
-          <a:prstGeom prst="rect">
-            <a:avLst/>
-          </a:prstGeom>
-          <a:noFill/>
-        </p:spPr>
-        <p:txBody>
-          <a:bodyPr wrap="square">
-            <a:spAutoFit/>
-          </a:bodyPr>
-          <a:lstStyle/>
-          <a:p>
-            <a:pPr algn="ctr"/>
-            <a:r>
-              <a:rPr sz="2200" b="0" i="1">
-                <a:solidFill>
-                  <a:srgbClr val="8C8C8C"/>
-                </a:solidFill>
-                <a:latin typeface="Arial"/>
-              </a:rPr>
-              <a:t/>
             </a:r>
           </a:p>
         </p:txBody>
@@ -4207,8 +3962,8 @@
         </p:nvSpPr>
         <p:spPr>
           <a:xfrm>
-            <a:off x="594360" y="2258568"/>
-            <a:ext cx="11002975" cy="685800"/>
+            <a:off x="640080" y="2052828"/>
+            <a:ext cx="10911535" cy="731520"/>
           </a:xfrm>
           <a:prstGeom prst="rect">
             <a:avLst/>
@@ -4223,7 +3978,7 @@
           <a:p>
             <a:pPr algn="ctr"/>
             <a:r>
-              <a:rPr sz="4141" b="1" i="0">
+              <a:rPr sz="4500" b="1" i="0">
                 <a:solidFill>
                   <a:srgbClr val="FFFFFF"/>
                 </a:solidFill>
@@ -4242,8 +3997,8 @@
         </p:nvSpPr>
         <p:spPr>
           <a:xfrm>
-            <a:off x="594360" y="2980944"/>
-            <a:ext cx="11002975" cy="347472"/>
+            <a:off x="640080" y="2985516"/>
+            <a:ext cx="10911535" cy="731520"/>
           </a:xfrm>
           <a:prstGeom prst="rect">
             <a:avLst/>
@@ -4258,83 +4013,13 @@
           <a:p>
             <a:pPr algn="ctr"/>
             <a:r>
-              <a:rPr sz="2200" b="0" i="1">
-                <a:solidFill>
-                  <a:srgbClr val="8C8C8C"/>
-                </a:solidFill>
-                <a:latin typeface="Arial"/>
-              </a:rPr>
-              <a:t/>
-            </a:r>
-          </a:p>
-        </p:txBody>
-      </p:sp>
-      <p:sp>
-        <p:nvSpPr>
-          <p:cNvPr id="4" name="TextBox 3"/>
-          <p:cNvSpPr txBox="1"/>
-          <p:nvPr/>
-        </p:nvSpPr>
-        <p:spPr>
-          <a:xfrm>
-            <a:off x="594360" y="3529584"/>
-            <a:ext cx="11002975" cy="685800"/>
-          </a:xfrm>
-          <a:prstGeom prst="rect">
-            <a:avLst/>
-          </a:prstGeom>
-          <a:noFill/>
-        </p:spPr>
-        <p:txBody>
-          <a:bodyPr wrap="square">
-            <a:spAutoFit/>
-          </a:bodyPr>
-          <a:lstStyle/>
-          <a:p>
-            <a:pPr algn="ctr"/>
-            <a:r>
-              <a:rPr sz="4400" b="1" i="0">
+              <a:rPr sz="4800" b="1" i="0">
                 <a:solidFill>
                   <a:srgbClr val="FFFFFF"/>
                 </a:solidFill>
                 <a:latin typeface="Arial"/>
               </a:rPr>
               <a:t>Natal, Natal Nasceu o Redentor</a:t>
-            </a:r>
-          </a:p>
-        </p:txBody>
-      </p:sp>
-      <p:sp>
-        <p:nvSpPr>
-          <p:cNvPr id="5" name="TextBox 4"/>
-          <p:cNvSpPr txBox="1"/>
-          <p:nvPr/>
-        </p:nvSpPr>
-        <p:spPr>
-          <a:xfrm>
-            <a:off x="594360" y="4251960"/>
-            <a:ext cx="11002975" cy="347472"/>
-          </a:xfrm>
-          <a:prstGeom prst="rect">
-            <a:avLst/>
-          </a:prstGeom>
-          <a:noFill/>
-        </p:spPr>
-        <p:txBody>
-          <a:bodyPr wrap="square">
-            <a:spAutoFit/>
-          </a:bodyPr>
-          <a:lstStyle/>
-          <a:p>
-            <a:pPr algn="ctr"/>
-            <a:r>
-              <a:rPr sz="2200" b="0" i="1">
-                <a:solidFill>
-                  <a:srgbClr val="8C8C8C"/>
-                </a:solidFill>
-                <a:latin typeface="Arial"/>
-              </a:rPr>
-              <a:t/>
             </a:r>
           </a:p>
         </p:txBody>
@@ -4373,8 +4058,8 @@
         </p:nvSpPr>
         <p:spPr>
           <a:xfrm>
-            <a:off x="594360" y="2894076"/>
-            <a:ext cx="11002975" cy="685800"/>
+            <a:off x="640080" y="2702052"/>
+            <a:ext cx="10911535" cy="731520"/>
           </a:xfrm>
           <a:prstGeom prst="rect">
             <a:avLst/>
@@ -4389,48 +4074,13 @@
           <a:p>
             <a:pPr algn="ctr"/>
             <a:r>
-              <a:rPr sz="4400" b="1" i="0">
+              <a:rPr sz="4800" b="1" i="0">
                 <a:solidFill>
                   <a:srgbClr val="FFFFFF"/>
                 </a:solidFill>
                 <a:latin typeface="Arial"/>
               </a:rPr>
               <a:t>Natal, Natal Nasceu o Redentor</a:t>
-            </a:r>
-          </a:p>
-        </p:txBody>
-      </p:sp>
-      <p:sp>
-        <p:nvSpPr>
-          <p:cNvPr id="3" name="TextBox 2"/>
-          <p:cNvSpPr txBox="1"/>
-          <p:nvPr/>
-        </p:nvSpPr>
-        <p:spPr>
-          <a:xfrm>
-            <a:off x="594360" y="3616452"/>
-            <a:ext cx="11002975" cy="347472"/>
-          </a:xfrm>
-          <a:prstGeom prst="rect">
-            <a:avLst/>
-          </a:prstGeom>
-          <a:noFill/>
-        </p:spPr>
-        <p:txBody>
-          <a:bodyPr wrap="square">
-            <a:spAutoFit/>
-          </a:bodyPr>
-          <a:lstStyle/>
-          <a:p>
-            <a:pPr algn="ctr"/>
-            <a:r>
-              <a:rPr sz="2200" b="0" i="1">
-                <a:solidFill>
-                  <a:srgbClr val="8C8C8C"/>
-                </a:solidFill>
-                <a:latin typeface="Arial"/>
-              </a:rPr>
-              <a:t/>
             </a:r>
           </a:p>
         </p:txBody>
@@ -4469,8 +4119,8 @@
         </p:nvSpPr>
         <p:spPr>
           <a:xfrm>
-            <a:off x="594360" y="1837944"/>
-            <a:ext cx="11002975" cy="685800"/>
+            <a:off x="640080" y="1650492"/>
+            <a:ext cx="10911535" cy="731520"/>
           </a:xfrm>
           <a:prstGeom prst="rect">
             <a:avLst/>
@@ -4485,7 +4135,7 @@
           <a:p>
             <a:pPr algn="ctr"/>
             <a:r>
-              <a:rPr sz="4400" b="1" i="0">
+              <a:rPr sz="4800" b="1" i="0">
                 <a:solidFill>
                   <a:srgbClr val="FFFFFF"/>
                 </a:solidFill>
@@ -4504,8 +4154,8 @@
         </p:nvSpPr>
         <p:spPr>
           <a:xfrm>
-            <a:off x="594360" y="2560320"/>
-            <a:ext cx="11002975" cy="384048"/>
+            <a:off x="640080" y="2418588"/>
+            <a:ext cx="10911535" cy="365760"/>
           </a:xfrm>
           <a:prstGeom prst="rect">
             <a:avLst/>
@@ -4522,7 +4172,7 @@
             <a:r>
               <a:rPr sz="2400" b="0" i="1">
                 <a:solidFill>
-                  <a:srgbClr val="B4B4B4"/>
+                  <a:srgbClr val="AAAAAA"/>
                 </a:solidFill>
                 <a:latin typeface="Arial"/>
               </a:rPr>
@@ -4539,8 +4189,8 @@
         </p:nvSpPr>
         <p:spPr>
           <a:xfrm>
-            <a:off x="594360" y="2980944"/>
-            <a:ext cx="11002975" cy="347472"/>
+            <a:off x="640080" y="2985516"/>
+            <a:ext cx="10911535" cy="731520"/>
           </a:xfrm>
           <a:prstGeom prst="rect">
             <a:avLst/>
@@ -4555,13 +4205,13 @@
           <a:p>
             <a:pPr algn="ctr"/>
             <a:r>
-              <a:rPr sz="2000" b="0" i="1">
-                <a:solidFill>
-                  <a:srgbClr val="8C8C8C"/>
+              <a:rPr sz="4800" b="1" i="0">
+                <a:solidFill>
+                  <a:srgbClr val="FFFFFF"/>
                 </a:solidFill>
                 <a:latin typeface="Arial"/>
               </a:rPr>
-              <a:t/>
+              <a:t>御子イェス  生まれ給う</a:t>
             </a:r>
           </a:p>
         </p:txBody>
@@ -4574,8 +4224,8 @@
         </p:nvSpPr>
         <p:spPr>
           <a:xfrm>
-            <a:off x="594360" y="3529584"/>
-            <a:ext cx="11002975" cy="685800"/>
+            <a:off x="640080" y="3753612"/>
+            <a:ext cx="10911535" cy="365760"/>
           </a:xfrm>
           <a:prstGeom prst="rect">
             <a:avLst/>
@@ -4590,13 +4240,13 @@
           <a:p>
             <a:pPr algn="ctr"/>
             <a:r>
-              <a:rPr sz="4400" b="1" i="0">
-                <a:solidFill>
-                  <a:srgbClr val="FFFFFF"/>
+              <a:rPr sz="2400" b="0" i="1">
+                <a:solidFill>
+                  <a:srgbClr val="AAAAAA"/>
                 </a:solidFill>
                 <a:latin typeface="Arial"/>
               </a:rPr>
-              <a:t>御子イェス  生まれ給う</a:t>
+              <a:t>miko iesu umare tamou</a:t>
             </a:r>
           </a:p>
         </p:txBody>
@@ -4609,8 +4259,8 @@
         </p:nvSpPr>
         <p:spPr>
           <a:xfrm>
-            <a:off x="594360" y="4251960"/>
-            <a:ext cx="11002975" cy="384048"/>
+            <a:off x="640080" y="4530852"/>
+            <a:ext cx="10911535" cy="310896"/>
           </a:xfrm>
           <a:prstGeom prst="rect">
             <a:avLst/>
@@ -4625,13 +4275,13 @@
           <a:p>
             <a:pPr algn="ctr"/>
             <a:r>
-              <a:rPr sz="2400" b="0" i="1">
-                <a:solidFill>
-                  <a:srgbClr val="B4B4B4"/>
+              <a:rPr sz="2000" b="0" i="1">
+                <a:solidFill>
+                  <a:srgbClr val="828282"/>
                 </a:solidFill>
                 <a:latin typeface="Arial"/>
               </a:rPr>
-              <a:t>miko iesu umare tamou</a:t>
+              <a:t>Estava o mundo pecador errante</a:t>
             </a:r>
           </a:p>
         </p:txBody>
@@ -4644,8 +4294,8 @@
         </p:nvSpPr>
         <p:spPr>
           <a:xfrm>
-            <a:off x="594360" y="4672584"/>
-            <a:ext cx="11002975" cy="347472"/>
+            <a:off x="640080" y="4896612"/>
+            <a:ext cx="10911535" cy="310896"/>
           </a:xfrm>
           <a:prstGeom prst="rect">
             <a:avLst/>
@@ -4662,11 +4312,11 @@
             <a:r>
               <a:rPr sz="2000" b="0" i="1">
                 <a:solidFill>
-                  <a:srgbClr val="8C8C8C"/>
+                  <a:srgbClr val="828282"/>
                 </a:solidFill>
                 <a:latin typeface="Arial"/>
               </a:rPr>
-              <a:t/>
+              <a:t>Até que o Cristo na terra apareceu</a:t>
             </a:r>
           </a:p>
         </p:txBody>
@@ -4705,8 +4355,8 @@
         </p:nvSpPr>
         <p:spPr>
           <a:xfrm>
-            <a:off x="594360" y="1837944"/>
-            <a:ext cx="11002975" cy="685800"/>
+            <a:off x="640080" y="1650492"/>
+            <a:ext cx="10911535" cy="731520"/>
           </a:xfrm>
           <a:prstGeom prst="rect">
             <a:avLst/>
@@ -4721,7 +4371,7 @@
           <a:p>
             <a:pPr algn="ctr"/>
             <a:r>
-              <a:rPr sz="4400" b="1" i="0">
+              <a:rPr sz="4800" b="1" i="0">
                 <a:solidFill>
                   <a:srgbClr val="FFFFFF"/>
                 </a:solidFill>
@@ -4740,8 +4390,8 @@
         </p:nvSpPr>
         <p:spPr>
           <a:xfrm>
-            <a:off x="594360" y="2560320"/>
-            <a:ext cx="11002975" cy="384048"/>
+            <a:off x="640080" y="2418588"/>
+            <a:ext cx="10911535" cy="365760"/>
           </a:xfrm>
           <a:prstGeom prst="rect">
             <a:avLst/>
@@ -4758,7 +4408,7 @@
             <a:r>
               <a:rPr sz="2400" b="0" i="1">
                 <a:solidFill>
-                  <a:srgbClr val="B4B4B4"/>
+                  <a:srgbClr val="AAAAAA"/>
                 </a:solidFill>
                 <a:latin typeface="Arial"/>
               </a:rPr>
@@ -4775,8 +4425,8 @@
         </p:nvSpPr>
         <p:spPr>
           <a:xfrm>
-            <a:off x="594360" y="2980944"/>
-            <a:ext cx="11002975" cy="347472"/>
+            <a:off x="640080" y="2985516"/>
+            <a:ext cx="10911535" cy="731520"/>
           </a:xfrm>
           <a:prstGeom prst="rect">
             <a:avLst/>
@@ -4791,13 +4441,13 @@
           <a:p>
             <a:pPr algn="ctr"/>
             <a:r>
-              <a:rPr sz="2000" b="0" i="1">
-                <a:solidFill>
-                  <a:srgbClr val="8C8C8C"/>
+              <a:rPr sz="4800" b="1" i="0">
+                <a:solidFill>
+                  <a:srgbClr val="FFFFFF"/>
                 </a:solidFill>
                 <a:latin typeface="Arial"/>
               </a:rPr>
-              <a:t/>
+              <a:t>メシヤを  待てる  た-み-に</a:t>
             </a:r>
           </a:p>
         </p:txBody>
@@ -4810,8 +4460,8 @@
         </p:nvSpPr>
         <p:spPr>
           <a:xfrm>
-            <a:off x="594360" y="3529584"/>
-            <a:ext cx="11002975" cy="685800"/>
+            <a:off x="640080" y="3753612"/>
+            <a:ext cx="10911535" cy="365760"/>
           </a:xfrm>
           <a:prstGeom prst="rect">
             <a:avLst/>
@@ -4826,13 +4476,13 @@
           <a:p>
             <a:pPr algn="ctr"/>
             <a:r>
-              <a:rPr sz="4400" b="1" i="0">
-                <a:solidFill>
-                  <a:srgbClr val="FFFFFF"/>
+              <a:rPr sz="2400" b="0" i="1">
+                <a:solidFill>
+                  <a:srgbClr val="AAAAAA"/>
                 </a:solidFill>
                 <a:latin typeface="Arial"/>
               </a:rPr>
-              <a:t>メシヤを  待てる  た-み-に</a:t>
+              <a:t>meshiya wo materu tami ni</a:t>
             </a:r>
           </a:p>
         </p:txBody>
@@ -4845,8 +4495,8 @@
         </p:nvSpPr>
         <p:spPr>
           <a:xfrm>
-            <a:off x="594360" y="4251960"/>
-            <a:ext cx="11002975" cy="384048"/>
+            <a:off x="640080" y="4530852"/>
+            <a:ext cx="10911535" cy="310896"/>
           </a:xfrm>
           <a:prstGeom prst="rect">
             <a:avLst/>
@@ -4861,13 +4511,13 @@
           <a:p>
             <a:pPr algn="ctr"/>
             <a:r>
-              <a:rPr sz="2400" b="0" i="1">
-                <a:solidFill>
-                  <a:srgbClr val="B4B4B4"/>
+              <a:rPr sz="2000" b="0" i="1">
+                <a:solidFill>
+                  <a:srgbClr val="828282"/>
                 </a:solidFill>
                 <a:latin typeface="Arial"/>
               </a:rPr>
-              <a:t>meshiya wo materu tami ni</a:t>
+              <a:t>As almas vivem nova esperança</a:t>
             </a:r>
           </a:p>
         </p:txBody>
@@ -4880,8 +4530,8 @@
         </p:nvSpPr>
         <p:spPr>
           <a:xfrm>
-            <a:off x="594360" y="4672584"/>
-            <a:ext cx="11002975" cy="347472"/>
+            <a:off x="640080" y="4896612"/>
+            <a:ext cx="10911535" cy="310896"/>
           </a:xfrm>
           <a:prstGeom prst="rect">
             <a:avLst/>
@@ -4898,11 +4548,11 @@
             <a:r>
               <a:rPr sz="2000" b="0" i="1">
                 <a:solidFill>
-                  <a:srgbClr val="8C8C8C"/>
+                  <a:srgbClr val="828282"/>
                 </a:solidFill>
                 <a:latin typeface="Arial"/>
               </a:rPr>
-              <a:t/>
+              <a:t>Em clara aurora, a nova luz se ergueu</a:t>
             </a:r>
           </a:p>
         </p:txBody>
@@ -4941,8 +4591,8 @@
         </p:nvSpPr>
         <p:spPr>
           <a:xfrm>
-            <a:off x="594360" y="1837944"/>
-            <a:ext cx="11002975" cy="685800"/>
+            <a:off x="640080" y="1650492"/>
+            <a:ext cx="10911535" cy="731520"/>
           </a:xfrm>
           <a:prstGeom prst="rect">
             <a:avLst/>
@@ -4957,7 +4607,7 @@
           <a:p>
             <a:pPr algn="ctr"/>
             <a:r>
-              <a:rPr sz="4400" b="1" i="0">
+              <a:rPr sz="4800" b="1" i="0">
                 <a:solidFill>
                   <a:srgbClr val="FFFFFF"/>
                 </a:solidFill>
@@ -4976,8 +4626,8 @@
         </p:nvSpPr>
         <p:spPr>
           <a:xfrm>
-            <a:off x="594360" y="2560320"/>
-            <a:ext cx="11002975" cy="384048"/>
+            <a:off x="640080" y="2418588"/>
+            <a:ext cx="10911535" cy="365760"/>
           </a:xfrm>
           <a:prstGeom prst="rect">
             <a:avLst/>
@@ -4994,7 +4644,7 @@
             <a:r>
               <a:rPr sz="2400" b="0" i="1">
                 <a:solidFill>
-                  <a:srgbClr val="B4B4B4"/>
+                  <a:srgbClr val="AAAAAA"/>
                 </a:solidFill>
                 <a:latin typeface="Arial"/>
               </a:rPr>
@@ -5011,8 +4661,8 @@
         </p:nvSpPr>
         <p:spPr>
           <a:xfrm>
-            <a:off x="594360" y="2980944"/>
-            <a:ext cx="11002975" cy="347472"/>
+            <a:off x="640080" y="2985516"/>
+            <a:ext cx="10911535" cy="731520"/>
           </a:xfrm>
           <a:prstGeom prst="rect">
             <a:avLst/>
@@ -5027,13 +4677,13 @@
           <a:p>
             <a:pPr algn="ctr"/>
             <a:r>
-              <a:rPr sz="2000" b="0" i="1">
-                <a:solidFill>
-                  <a:srgbClr val="8C8C8C"/>
+              <a:rPr sz="4800" b="1" i="0">
+                <a:solidFill>
+                  <a:srgbClr val="FFFFFF"/>
                 </a:solidFill>
                 <a:latin typeface="Arial"/>
               </a:rPr>
-              <a:t/>
+              <a:t>さかえ ある 日は 昇る</a:t>
             </a:r>
           </a:p>
         </p:txBody>
@@ -5046,8 +4696,8 @@
         </p:nvSpPr>
         <p:spPr>
           <a:xfrm>
-            <a:off x="594360" y="3529584"/>
-            <a:ext cx="11002975" cy="685800"/>
+            <a:off x="640080" y="3753612"/>
+            <a:ext cx="10911535" cy="365760"/>
           </a:xfrm>
           <a:prstGeom prst="rect">
             <a:avLst/>
@@ -5062,13 +4712,13 @@
           <a:p>
             <a:pPr algn="ctr"/>
             <a:r>
-              <a:rPr sz="4400" b="1" i="0">
-                <a:solidFill>
-                  <a:srgbClr val="FFFFFF"/>
+              <a:rPr sz="2400" b="0" i="1">
+                <a:solidFill>
+                  <a:srgbClr val="AAAAAA"/>
                 </a:solidFill>
                 <a:latin typeface="Arial"/>
               </a:rPr>
-              <a:t>さかえ ある 日は 昇る</a:t>
+              <a:t>sakae aru hi wa noboru</a:t>
             </a:r>
           </a:p>
         </p:txBody>
@@ -5081,8 +4731,8 @@
         </p:nvSpPr>
         <p:spPr>
           <a:xfrm>
-            <a:off x="594360" y="4251960"/>
-            <a:ext cx="11002975" cy="384048"/>
+            <a:off x="640080" y="4530852"/>
+            <a:ext cx="10911535" cy="310896"/>
           </a:xfrm>
           <a:prstGeom prst="rect">
             <a:avLst/>
@@ -5097,13 +4747,13 @@
           <a:p>
             <a:pPr algn="ctr"/>
             <a:r>
-              <a:rPr sz="2400" b="0" i="1">
-                <a:solidFill>
-                  <a:srgbClr val="B4B4B4"/>
+              <a:rPr sz="2000" b="0" i="1">
+                <a:solidFill>
+                  <a:srgbClr val="828282"/>
                 </a:solidFill>
                 <a:latin typeface="Arial"/>
               </a:rPr>
-              <a:t>sakae aru hi wa noboru</a:t>
+              <a:t>Ajoelhai, ouvi a voz dos anjos</a:t>
             </a:r>
           </a:p>
         </p:txBody>
@@ -5116,8 +4766,8 @@
         </p:nvSpPr>
         <p:spPr>
           <a:xfrm>
-            <a:off x="594360" y="4672584"/>
-            <a:ext cx="11002975" cy="347472"/>
+            <a:off x="640080" y="4896612"/>
+            <a:ext cx="10911535" cy="310896"/>
           </a:xfrm>
           <a:prstGeom prst="rect">
             <a:avLst/>
@@ -5134,11 +4784,11 @@
             <a:r>
               <a:rPr sz="2000" b="0" i="1">
                 <a:solidFill>
-                  <a:srgbClr val="8C8C8C"/>
+                  <a:srgbClr val="828282"/>
                 </a:solidFill>
                 <a:latin typeface="Arial"/>
               </a:rPr>
-              <a:t/>
+              <a:t>Natal, Natal Nasceu o vosso Rei</a:t>
             </a:r>
           </a:p>
         </p:txBody>

--- a/output_pptx/O_Holy_Night.pptx
+++ b/output_pptx/O_Holy_Night.pptx
@@ -3343,6 +3343,76 @@
           </a:p>
         </p:txBody>
       </p:sp>
+      <p:sp>
+        <p:nvSpPr>
+          <p:cNvPr id="4" name="TextBox 3"/>
+          <p:cNvSpPr txBox="1"/>
+          <p:nvPr/>
+        </p:nvSpPr>
+        <p:spPr>
+          <a:xfrm>
+            <a:off x="640080" y="4128516"/>
+            <a:ext cx="10911535" cy="310896"/>
+          </a:xfrm>
+          <a:prstGeom prst="rect">
+            <a:avLst/>
+          </a:prstGeom>
+          <a:noFill/>
+        </p:spPr>
+        <p:txBody>
+          <a:bodyPr wrap="square">
+            <a:spAutoFit/>
+          </a:bodyPr>
+          <a:lstStyle/>
+          <a:p>
+            <a:pPr algn="ctr"/>
+            <a:r>
+              <a:rPr sz="2000" b="0" i="0">
+                <a:solidFill>
+                  <a:srgbClr val="828282"/>
+                </a:solidFill>
+                <a:latin typeface="Arial"/>
+              </a:rPr>
+              <a:t>クリスマス、クリスマス 救い主が生まれた</a:t>
+            </a:r>
+          </a:p>
+        </p:txBody>
+      </p:sp>
+      <p:sp>
+        <p:nvSpPr>
+          <p:cNvPr id="5" name="TextBox 4"/>
+          <p:cNvSpPr txBox="1"/>
+          <p:nvPr/>
+        </p:nvSpPr>
+        <p:spPr>
+          <a:xfrm>
+            <a:off x="640080" y="4494276"/>
+            <a:ext cx="10911535" cy="310896"/>
+          </a:xfrm>
+          <a:prstGeom prst="rect">
+            <a:avLst/>
+          </a:prstGeom>
+          <a:noFill/>
+        </p:spPr>
+        <p:txBody>
+          <a:bodyPr wrap="square">
+            <a:spAutoFit/>
+          </a:bodyPr>
+          <a:lstStyle/>
+          <a:p>
+            <a:pPr algn="ctr"/>
+            <a:r>
+              <a:rPr sz="2000" b="0" i="0">
+                <a:solidFill>
+                  <a:srgbClr val="828282"/>
+                </a:solidFill>
+                <a:latin typeface="Arial"/>
+              </a:rPr>
+              <a:t>ひざまずきなさい、天使たちの声を聞きなさい</a:t>
+            </a:r>
+          </a:p>
+        </p:txBody>
+      </p:sp>
     </p:spTree>
   </p:cSld>
   <p:clrMapOvr>
@@ -3439,6 +3509,76 @@
           </a:p>
         </p:txBody>
       </p:sp>
+      <p:sp>
+        <p:nvSpPr>
+          <p:cNvPr id="4" name="TextBox 3"/>
+          <p:cNvSpPr txBox="1"/>
+          <p:nvPr/>
+        </p:nvSpPr>
+        <p:spPr>
+          <a:xfrm>
+            <a:off x="640080" y="4128516"/>
+            <a:ext cx="10911535" cy="310896"/>
+          </a:xfrm>
+          <a:prstGeom prst="rect">
+            <a:avLst/>
+          </a:prstGeom>
+          <a:noFill/>
+        </p:spPr>
+        <p:txBody>
+          <a:bodyPr wrap="square">
+            <a:spAutoFit/>
+          </a:bodyPr>
+          <a:lstStyle/>
+          <a:p>
+            <a:pPr algn="ctr"/>
+            <a:r>
+              <a:rPr sz="2000" b="0" i="0">
+                <a:solidFill>
+                  <a:srgbClr val="828282"/>
+                </a:solidFill>
+                <a:latin typeface="Arial"/>
+              </a:rPr>
+              <a:t>クリスマス、クリスマス 王の王が生まれた</a:t>
+            </a:r>
+          </a:p>
+        </p:txBody>
+      </p:sp>
+      <p:sp>
+        <p:nvSpPr>
+          <p:cNvPr id="5" name="TextBox 4"/>
+          <p:cNvSpPr txBox="1"/>
+          <p:nvPr/>
+        </p:nvSpPr>
+        <p:spPr>
+          <a:xfrm>
+            <a:off x="640080" y="4494276"/>
+            <a:ext cx="10911535" cy="310896"/>
+          </a:xfrm>
+          <a:prstGeom prst="rect">
+            <a:avLst/>
+          </a:prstGeom>
+          <a:noFill/>
+        </p:spPr>
+        <p:txBody>
+          <a:bodyPr wrap="square">
+            <a:spAutoFit/>
+          </a:bodyPr>
+          <a:lstStyle/>
+          <a:p>
+            <a:pPr algn="ctr"/>
+            <a:r>
+              <a:rPr sz="2000" b="0" i="0">
+                <a:solidFill>
+                  <a:srgbClr val="828282"/>
+                </a:solidFill>
+                <a:latin typeface="Arial"/>
+              </a:rPr>
+              <a:t>クリスマス、クリスマス 救い主が生まれた</a:t>
+            </a:r>
+          </a:p>
+        </p:txBody>
+      </p:sp>
     </p:spTree>
   </p:cSld>
   <p:clrMapOvr>
@@ -3500,6 +3640,41 @@
           </a:p>
         </p:txBody>
       </p:sp>
+      <p:sp>
+        <p:nvSpPr>
+          <p:cNvPr id="3" name="TextBox 2"/>
+          <p:cNvSpPr txBox="1"/>
+          <p:nvPr/>
+        </p:nvSpPr>
+        <p:spPr>
+          <a:xfrm>
+            <a:off x="640080" y="3845052"/>
+            <a:ext cx="10911535" cy="310896"/>
+          </a:xfrm>
+          <a:prstGeom prst="rect">
+            <a:avLst/>
+          </a:prstGeom>
+          <a:noFill/>
+        </p:spPr>
+        <p:txBody>
+          <a:bodyPr wrap="square">
+            <a:spAutoFit/>
+          </a:bodyPr>
+          <a:lstStyle/>
+          <a:p>
+            <a:pPr algn="ctr"/>
+            <a:r>
+              <a:rPr sz="2000" b="0" i="0">
+                <a:solidFill>
+                  <a:srgbClr val="828282"/>
+                </a:solidFill>
+                <a:latin typeface="Arial"/>
+              </a:rPr>
+              <a:t>クリスマス、クリスマス 救い主が生まれた</a:t>
+            </a:r>
+          </a:p>
+        </p:txBody>
+      </p:sp>
     </p:spTree>
   </p:cSld>
   <p:clrMapOvr>
@@ -3928,6 +4103,76 @@
           </a:p>
         </p:txBody>
       </p:sp>
+      <p:sp>
+        <p:nvSpPr>
+          <p:cNvPr id="4" name="TextBox 3"/>
+          <p:cNvSpPr txBox="1"/>
+          <p:nvPr/>
+        </p:nvSpPr>
+        <p:spPr>
+          <a:xfrm>
+            <a:off x="640080" y="4128516"/>
+            <a:ext cx="10911535" cy="310896"/>
+          </a:xfrm>
+          <a:prstGeom prst="rect">
+            <a:avLst/>
+          </a:prstGeom>
+          <a:noFill/>
+        </p:spPr>
+        <p:txBody>
+          <a:bodyPr wrap="square">
+            <a:spAutoFit/>
+          </a:bodyPr>
+          <a:lstStyle/>
+          <a:p>
+            <a:pPr algn="ctr"/>
+            <a:r>
+              <a:rPr sz="2000" b="0" i="0">
+                <a:solidFill>
+                  <a:srgbClr val="828282"/>
+                </a:solidFill>
+                <a:latin typeface="Arial"/>
+              </a:rPr>
+              <a:t>クリスマス、クリスマス 救い主が生まれた</a:t>
+            </a:r>
+          </a:p>
+        </p:txBody>
+      </p:sp>
+      <p:sp>
+        <p:nvSpPr>
+          <p:cNvPr id="5" name="TextBox 4"/>
+          <p:cNvSpPr txBox="1"/>
+          <p:nvPr/>
+        </p:nvSpPr>
+        <p:spPr>
+          <a:xfrm>
+            <a:off x="640080" y="4494276"/>
+            <a:ext cx="10911535" cy="310896"/>
+          </a:xfrm>
+          <a:prstGeom prst="rect">
+            <a:avLst/>
+          </a:prstGeom>
+          <a:noFill/>
+        </p:spPr>
+        <p:txBody>
+          <a:bodyPr wrap="square">
+            <a:spAutoFit/>
+          </a:bodyPr>
+          <a:lstStyle/>
+          <a:p>
+            <a:pPr algn="ctr"/>
+            <a:r>
+              <a:rPr sz="2000" b="0" i="0">
+                <a:solidFill>
+                  <a:srgbClr val="828282"/>
+                </a:solidFill>
+                <a:latin typeface="Arial"/>
+              </a:rPr>
+              <a:t>ひざまずきなさい、天使たちの声を聞きなさい</a:t>
+            </a:r>
+          </a:p>
+        </p:txBody>
+      </p:sp>
     </p:spTree>
   </p:cSld>
   <p:clrMapOvr>
@@ -4024,6 +4269,76 @@
           </a:p>
         </p:txBody>
       </p:sp>
+      <p:sp>
+        <p:nvSpPr>
+          <p:cNvPr id="4" name="TextBox 3"/>
+          <p:cNvSpPr txBox="1"/>
+          <p:nvPr/>
+        </p:nvSpPr>
+        <p:spPr>
+          <a:xfrm>
+            <a:off x="640080" y="4128516"/>
+            <a:ext cx="10911535" cy="310896"/>
+          </a:xfrm>
+          <a:prstGeom prst="rect">
+            <a:avLst/>
+          </a:prstGeom>
+          <a:noFill/>
+        </p:spPr>
+        <p:txBody>
+          <a:bodyPr wrap="square">
+            <a:spAutoFit/>
+          </a:bodyPr>
+          <a:lstStyle/>
+          <a:p>
+            <a:pPr algn="ctr"/>
+            <a:r>
+              <a:rPr sz="2000" b="0" i="0">
+                <a:solidFill>
+                  <a:srgbClr val="828282"/>
+                </a:solidFill>
+                <a:latin typeface="Arial"/>
+              </a:rPr>
+              <a:t>クリスマス、クリスマス 王の王が生まれた</a:t>
+            </a:r>
+          </a:p>
+        </p:txBody>
+      </p:sp>
+      <p:sp>
+        <p:nvSpPr>
+          <p:cNvPr id="5" name="TextBox 4"/>
+          <p:cNvSpPr txBox="1"/>
+          <p:nvPr/>
+        </p:nvSpPr>
+        <p:spPr>
+          <a:xfrm>
+            <a:off x="640080" y="4494276"/>
+            <a:ext cx="10911535" cy="310896"/>
+          </a:xfrm>
+          <a:prstGeom prst="rect">
+            <a:avLst/>
+          </a:prstGeom>
+          <a:noFill/>
+        </p:spPr>
+        <p:txBody>
+          <a:bodyPr wrap="square">
+            <a:spAutoFit/>
+          </a:bodyPr>
+          <a:lstStyle/>
+          <a:p>
+            <a:pPr algn="ctr"/>
+            <a:r>
+              <a:rPr sz="2000" b="0" i="0">
+                <a:solidFill>
+                  <a:srgbClr val="828282"/>
+                </a:solidFill>
+                <a:latin typeface="Arial"/>
+              </a:rPr>
+              <a:t>クリスマス、クリスマス 救い主が生まれた</a:t>
+            </a:r>
+          </a:p>
+        </p:txBody>
+      </p:sp>
     </p:spTree>
   </p:cSld>
   <p:clrMapOvr>
@@ -4081,6 +4396,41 @@
                 <a:latin typeface="Arial"/>
               </a:rPr>
               <a:t>Natal, Natal Nasceu o Redentor</a:t>
+            </a:r>
+          </a:p>
+        </p:txBody>
+      </p:sp>
+      <p:sp>
+        <p:nvSpPr>
+          <p:cNvPr id="3" name="TextBox 2"/>
+          <p:cNvSpPr txBox="1"/>
+          <p:nvPr/>
+        </p:nvSpPr>
+        <p:spPr>
+          <a:xfrm>
+            <a:off x="640080" y="3845052"/>
+            <a:ext cx="10911535" cy="310896"/>
+          </a:xfrm>
+          <a:prstGeom prst="rect">
+            <a:avLst/>
+          </a:prstGeom>
+          <a:noFill/>
+        </p:spPr>
+        <p:txBody>
+          <a:bodyPr wrap="square">
+            <a:spAutoFit/>
+          </a:bodyPr>
+          <a:lstStyle/>
+          <a:p>
+            <a:pPr algn="ctr"/>
+            <a:r>
+              <a:rPr sz="2000" b="0" i="0">
+                <a:solidFill>
+                  <a:srgbClr val="828282"/>
+                </a:solidFill>
+                <a:latin typeface="Arial"/>
+              </a:rPr>
+              <a:t>クリスマス、クリスマス 救い主が生まれた</a:t>
             </a:r>
           </a:p>
         </p:txBody>
